--- a/Sudoku Plus.pptx
+++ b/Sudoku Plus.pptx
@@ -7690,13 +7690,16 @@
         <p:spPr>
           <a:xfrm>
             <a:off x="1524000" y="406400"/>
-            <a:ext cx="9144000" cy="1229895"/>
+            <a:ext cx="9144000" cy="931989"/>
           </a:xfrm>
         </p:spPr>
         <p:txBody>
-          <a:bodyPr anchor="ctr"/>
+          <a:bodyPr anchor="t">
+            <a:normAutofit/>
+          </a:bodyPr>
           <a:lstStyle/>
           <a:p>
+            <a:pPr algn="ctr"/>
             <a:r>
               <a:rPr lang="en-US" dirty="0">
                 <a:latin typeface="Agency FB" panose="020B0503020202020204" pitchFamily="34" charset="0"/>
@@ -7724,8 +7727,8 @@
         </p:nvSpPr>
         <p:spPr>
           <a:xfrm>
-            <a:off x="1524000" y="1475873"/>
-            <a:ext cx="9144000" cy="1655762"/>
+            <a:off x="1524000" y="1355641"/>
+            <a:ext cx="9144000" cy="1074080"/>
           </a:xfrm>
         </p:spPr>
         <p:txBody>
@@ -7734,25 +7737,38 @@
           </a:bodyPr>
           <a:lstStyle/>
           <a:p>
+            <a:pPr algn="ctr"/>
             <a:r>
-              <a:rPr lang="en-US" sz="3200" dirty="0">
+              <a:rPr lang="en-US" sz="2800" dirty="0">
                 <a:latin typeface="Agency FB" panose="020B0503020202020204" pitchFamily="34" charset="0"/>
               </a:rPr>
               <a:t>Made by Aiden Caraway</a:t>
             </a:r>
             <a:br>
-              <a:rPr lang="en-US" sz="3200" dirty="0">
+              <a:rPr lang="en-US" sz="2800" dirty="0">
                 <a:latin typeface="Agency FB" panose="020B0503020202020204" pitchFamily="34" charset="0"/>
               </a:rPr>
             </a:br>
             <a:r>
-              <a:rPr lang="en-US" sz="3200" dirty="0">
+              <a:rPr lang="en-US" sz="2800" dirty="0">
+                <a:solidFill>
+                  <a:schemeClr val="accent1"/>
+                </a:solidFill>
                 <a:latin typeface="Agency FB" panose="020B0503020202020204" pitchFamily="34" charset="0"/>
-                <a:hlinkClick r:id="rId2"/>
+                <a:hlinkClick r:id="rId2">
+                  <a:extLst>
+                    <a:ext uri="{A12FA001-AC4F-418D-AE19-62706E023703}">
+                      <ahyp:hlinkClr xmlns:ahyp="http://schemas.microsoft.com/office/drawing/2018/hyperlinkcolor" val="tx"/>
+                    </a:ext>
+                  </a:extLst>
+                </a:hlinkClick>
               </a:rPr>
               <a:t>https://github.com/ksu-is/Sudoku-Plus</a:t>
             </a:r>
-            <a:endParaRPr lang="en-US" sz="3200" dirty="0">
+            <a:endParaRPr lang="en-US" sz="2800" dirty="0">
+              <a:solidFill>
+                <a:schemeClr val="accent1"/>
+              </a:solidFill>
               <a:latin typeface="Agency FB" panose="020B0503020202020204" pitchFamily="34" charset="0"/>
             </a:endParaRPr>
           </a:p>
@@ -7774,15 +7790,18 @@
         </p:nvSpPr>
         <p:spPr>
           <a:xfrm>
-            <a:off x="1524000" y="2705768"/>
-            <a:ext cx="9144000" cy="1655762"/>
+            <a:off x="1774885" y="2578460"/>
+            <a:ext cx="8642230" cy="700963"/>
           </a:xfrm>
           <a:prstGeom prst="rect">
             <a:avLst/>
           </a:prstGeom>
+          <a:ln>
+            <a:noFill/>
+          </a:ln>
         </p:spPr>
         <p:txBody>
-          <a:bodyPr vert="horz" lIns="91440" tIns="45720" rIns="91440" bIns="45720" rtlCol="0">
+          <a:bodyPr vert="horz" lIns="91440" tIns="45720" rIns="91440" bIns="45720" rtlCol="0" anchor="ctr">
             <a:normAutofit/>
           </a:bodyPr>
           <a:lstStyle>
@@ -7954,7 +7973,7 @@
               <a:rPr lang="en-US" dirty="0">
                 <a:latin typeface="Agency FB" panose="020B0503020202020204" pitchFamily="34" charset="0"/>
               </a:rPr>
-              <a:t>A Sudoku-like game where the goal is to finish the puzzle as quickly as possible.</a:t>
+              <a:t>A fast-paced Sudoku game where the goal is to finish the puzzle as quickly as possible.</a:t>
             </a:r>
           </a:p>
         </p:txBody>
@@ -7981,7 +8000,7 @@
         </p:blipFill>
         <p:spPr>
           <a:xfrm>
-            <a:off x="4740628" y="3429000"/>
+            <a:off x="4740628" y="3498011"/>
             <a:ext cx="2710744" cy="3164761"/>
           </a:xfrm>
           <a:prstGeom prst="rect">
@@ -8000,6 +8019,60 @@
           </a:effectLst>
         </p:spPr>
       </p:pic>
+      <p:sp>
+        <p:nvSpPr>
+          <p:cNvPr id="9" name="Rectangle: Rounded Corners 8">
+            <a:extLst>
+              <a:ext uri="{FF2B5EF4-FFF2-40B4-BE49-F238E27FC236}">
+                <a16:creationId xmlns:a16="http://schemas.microsoft.com/office/drawing/2014/main" id="{5F22DAE0-B2C1-81D7-B09F-7B23FF001825}"/>
+              </a:ext>
+            </a:extLst>
+          </p:cNvPr>
+          <p:cNvSpPr/>
+          <p:nvPr/>
+        </p:nvSpPr>
+        <p:spPr>
+          <a:xfrm>
+            <a:off x="1774883" y="2563567"/>
+            <a:ext cx="8642231" cy="730747"/>
+          </a:xfrm>
+          <a:prstGeom prst="roundRect">
+            <a:avLst/>
+          </a:prstGeom>
+          <a:noFill/>
+          <a:ln w="28575" cap="flat" cmpd="sng" algn="ctr">
+            <a:solidFill>
+              <a:schemeClr val="accent1"/>
+            </a:solidFill>
+            <a:prstDash val="solid"/>
+            <a:round/>
+            <a:headEnd type="none" w="med" len="med"/>
+            <a:tailEnd type="none" w="med" len="med"/>
+          </a:ln>
+        </p:spPr>
+        <p:style>
+          <a:lnRef idx="0">
+            <a:scrgbClr r="0" g="0" b="0"/>
+          </a:lnRef>
+          <a:fillRef idx="0">
+            <a:scrgbClr r="0" g="0" b="0"/>
+          </a:fillRef>
+          <a:effectRef idx="0">
+            <a:scrgbClr r="0" g="0" b="0"/>
+          </a:effectRef>
+          <a:fontRef idx="minor">
+            <a:schemeClr val="dk1"/>
+          </a:fontRef>
+        </p:style>
+        <p:txBody>
+          <a:bodyPr rtlCol="0" anchor="ctr"/>
+          <a:lstStyle/>
+          <a:p>
+            <a:pPr algn="ctr"/>
+            <a:endParaRPr lang="en-US"/>
+          </a:p>
+        </p:txBody>
+      </p:sp>
     </p:spTree>
     <p:extLst>
       <p:ext uri="{BB962C8B-B14F-4D97-AF65-F5344CB8AC3E}">

--- a/Sudoku Plus.pptx
+++ b/Sudoku Plus.pptx
@@ -8073,6 +8073,42 @@
           </a:p>
         </p:txBody>
       </p:sp>
+      <p:pic>
+        <p:nvPicPr>
+          <p:cNvPr id="11" name="Picture 10" descr="A blue circle with a pencil and a question mark on it">
+            <a:extLst>
+              <a:ext uri="{FF2B5EF4-FFF2-40B4-BE49-F238E27FC236}">
+                <a16:creationId xmlns:a16="http://schemas.microsoft.com/office/drawing/2014/main" id="{C37DDBEB-2620-FFDA-A512-8CC6EE4D09E4}"/>
+              </a:ext>
+            </a:extLst>
+          </p:cNvPr>
+          <p:cNvPicPr>
+            <a:picLocks noChangeAspect="1"/>
+          </p:cNvPicPr>
+          <p:nvPr/>
+        </p:nvPicPr>
+        <p:blipFill>
+          <a:blip r:embed="rId4">
+            <a:extLst>
+              <a:ext uri="{28A0092B-C50C-407E-A947-70E740481C1C}">
+                <a14:useLocalDpi xmlns:a14="http://schemas.microsoft.com/office/drawing/2010/main" val="0"/>
+              </a:ext>
+            </a:extLst>
+          </a:blip>
+          <a:stretch>
+            <a:fillRect/>
+          </a:stretch>
+        </p:blipFill>
+        <p:spPr>
+          <a:xfrm>
+            <a:off x="10417114" y="244415"/>
+            <a:ext cx="1530471" cy="1530471"/>
+          </a:xfrm>
+          <a:prstGeom prst="rect">
+            <a:avLst/>
+          </a:prstGeom>
+        </p:spPr>
+      </p:pic>
     </p:spTree>
     <p:extLst>
       <p:ext uri="{BB962C8B-B14F-4D97-AF65-F5344CB8AC3E}">
